--- a/docs/specs/006-validacion-pitch-entrega/materiales/pitch-v7.pptx
+++ b/docs/specs/006-validacion-pitch-entrega/materiales/pitch-v7.pptx
@@ -3493,7 +3493,7 @@
                 </a:solidFill>
                 <a:latin typeface="Open Sans"/>
               </a:rPr>
-              <a:t>¡Hola! Soy Chillo: usamos </a:t>
+              <a:t>¡Hola! Soy Chillo: el motor </a:t>
             </a:r>
             <a:r>
               <a:rPr sz="1500" b="1" i="0">
@@ -3502,7 +3502,7 @@
                 </a:solidFill>
                 <a:latin typeface="Open Sans"/>
               </a:rPr>
-              <a:t>IA para planificar rutas</a:t>
+              <a:t>calcula y la IA explica</a:t>
             </a:r>
             <a:r>
               <a:rPr sz="1500" b="1" i="0">
@@ -3511,7 +3511,7 @@
                 </a:solidFill>
                 <a:latin typeface="Open Sans"/>
               </a:rPr>
-              <a:t> y llegar antes que la llamada.</a:t>
+              <a:t> para llegar antes que la llamada.</a:t>
             </a:r>
           </a:p>
         </p:txBody>
@@ -4178,7 +4178,7 @@
                 </a:solidFill>
                 <a:latin typeface="Open Sans"/>
               </a:rPr>
-              <a:t>Fuente: ensayo técnico #285 (demo-quito-planificacion): 4 pedidos, 6 entregas críticas; opciones A, B y C de 02-suggest-pitch-abc.json · matriz P-02, P-04, P-05. Escenario sintético: no son clientes ni operaciones medidas.</a:t>
+              <a:t>Fuente: ensayo técnico del motor sobre un escenario sintético de Quito: 4 pedidos, 6 entregas críticas, opciones A, B y C. No son clientes ni operaciones medidas.</a:t>
             </a:r>
           </a:p>
         </p:txBody>
@@ -6938,7 +6938,7 @@
                 </a:solidFill>
                 <a:latin typeface="Open Sans"/>
               </a:rPr>
-              <a:t>Fuente: ensayo técnico #285 (PR #295, 1585ab7), 02-suggest-pitch-abc.json · demo-quito-planificacion, corrida local 17-oct · 4 pedidos, 6 entregas críticas, 55,9 km · diésel USD 3,11/gal (Primicias, 12-oct) · matriz P-02.</a:t>
+              <a:t>Fuente: ensayo técnico local del motor, 17-oct · escenario sintético de Quito · 4 pedidos, 6 entregas críticas, 55,9 km · diésel USD 3,11/gal (Primicias, 12-oct). Una sola corrida, sin clientes reales.</a:t>
             </a:r>
           </a:p>
         </p:txBody>
@@ -10823,7 +10823,7 @@
                 </a:solidFill>
                 <a:latin typeface="Open Sans"/>
               </a:rPr>
-              <a:t>Fuente: matriz A-02 (hipótesis del sector), A-06, A-08, A-10, A-11 y A-12 (run n8n 292, respaldo sin IA). Lo del sector es lo que escuchamos, no una medición.</a:t>
+              <a:t>Fuente: lo del sector es lo que escuchamos en la charla, no una medición. Una corrida registrada del agente incluyó su caída a la explicación de respaldo.</a:t>
             </a:r>
           </a:p>
         </p:txBody>
@@ -11958,7 +11958,7 @@
                 </a:solidFill>
                 <a:latin typeface="Open Sans"/>
               </a:rPr>
-              <a:t>Fuente: matriz de afirmaciones P-02, P-04, P-05, A-03, A-11, A-12, A-13, A-15, A-21 y #198. Escenario sintético de Quito: 40 puntos, no son clientes.</a:t>
+              <a:t>Fuente: escenario sintético de Quito: 40 puntos, no son clientes. El recorrido sin señal está construido y aún no se ensayó en un teléfono real.</a:t>
             </a:r>
           </a:p>
         </p:txBody>
@@ -12280,7 +12280,7 @@
                   </a:solidFill>
                   <a:latin typeface="Oswald"/>
                 </a:rPr>
-                <a:t>PROBADO</a:t>
+                <a:t>ENSAYADO</a:t>
               </a:r>
             </a:p>
           </p:txBody>
@@ -12498,6 +12498,25 @@
                   <a:latin typeface="Open Sans"/>
                 </a:rPr>
                 <a:t>•  Usarlo en una empresa real: cargar sus datos y medir contra su línea base</a:t>
+              </a:r>
+            </a:p>
+            <a:p>
+              <a:pPr algn="l">
+                <a:lnSpc>
+                  <a:spcPct val="105000"/>
+                </a:lnSpc>
+                <a:spcAft>
+                  <a:spcPts val="800"/>
+                </a:spcAft>
+              </a:pPr>
+              <a:r>
+                <a:rPr sz="1550" b="1" i="0">
+                  <a:solidFill>
+                    <a:srgbClr val="E6D7A3"/>
+                  </a:solidFill>
+                  <a:latin typeface="Open Sans"/>
+                </a:rPr>
+                <a:t>•  Probar el recorrido sin señal en un teléfono real</a:t>
               </a:r>
             </a:p>
             <a:p>
@@ -13159,7 +13178,7 @@
                 </a:solidFill>
                 <a:latin typeface="Open Sans"/>
               </a:rPr>
-              <a:t>Fuente: matriz A-21 (sin ahorro prometido), A-26 y A-30 (costo y precio por validar), A-31 (modelo), P-07 (indicadores en curso); pantalla Reportes (código en develop, sin ensayo de la escena). Sujeto a validación.</a:t>
+              <a:t>Fuente: sin ahorro prometido; costo y precio por validar en el piloto; modelo como hipótesis. La sección Reportes existe en el sistema, sin ensayo de la escena.</a:t>
             </a:r>
           </a:p>
         </p:txBody>
@@ -14707,7 +14726,7 @@
                 </a:solidFill>
                 <a:latin typeface="Open Sans"/>
               </a:rPr>
-              <a:t>Fuente: matriz A-21, A-32 y P-02. Propuesta sin contraparte confirmada; sujeta a validación.</a:t>
+              <a:t>Fuente: propuesta sin contraparte confirmada ni cliente comprometido; sujeta a validación.</a:t>
             </a:r>
           </a:p>
         </p:txBody>
